--- a/media/resources/files/Onduktar_Akcha_KalkulyatorsuzIshtoo_JooptorLabyrynthi.pptx
+++ b/media/resources/files/Onduktar_Akcha_KalkulyatorsuzIshtoo_JooptorLabyrynthi.pptx
@@ -4796,7 +4796,7 @@
               <a:rPr lang="en-GB" sz="2000" b="1" dirty="0">
                 <a:latin typeface="Agency FB" panose="020B0503020202020204" pitchFamily="34" charset="0"/>
               </a:rPr>
-              <a:t>START!</a:t>
+              <a:t>Башта!</a:t>
             </a:r>
           </a:p>
         </p:txBody>
@@ -4893,7 +4893,7 @@
               <a:rPr lang="en-GB" sz="2000" b="1" dirty="0">
                 <a:latin typeface="Agency FB" panose="020B0503020202020204" pitchFamily="34" charset="0"/>
               </a:rPr>
-              <a:t>START!</a:t>
+              <a:t>Башта!</a:t>
             </a:r>
           </a:p>
         </p:txBody>
@@ -5061,7 +5061,7 @@
               <a:rPr lang="en-GB" sz="2000" b="1" dirty="0">
                 <a:latin typeface="Agency FB" panose="020B0503020202020204" pitchFamily="34" charset="0"/>
               </a:rPr>
-              <a:t>START!</a:t>
+              <a:t>Башта!</a:t>
             </a:r>
           </a:p>
         </p:txBody>
@@ -5237,7 +5237,7 @@
               <a:rPr lang="en-GB" sz="2000" b="1" dirty="0">
                 <a:latin typeface="Agency FB" panose="020B0503020202020204" pitchFamily="34" charset="0"/>
               </a:rPr>
-              <a:t>START!</a:t>
+              <a:t>Башта!</a:t>
             </a:r>
           </a:p>
         </p:txBody>
@@ -5413,7 +5413,7 @@
               <a:rPr lang="en-GB" sz="2000" b="1" dirty="0">
                 <a:latin typeface="Agency FB" panose="020B0503020202020204" pitchFamily="34" charset="0"/>
               </a:rPr>
-              <a:t>START!</a:t>
+              <a:t>Башта!</a:t>
             </a:r>
           </a:p>
         </p:txBody>
@@ -5589,7 +5589,7 @@
               <a:rPr lang="en-GB" sz="2000" b="1" dirty="0">
                 <a:latin typeface="Agency FB" panose="020B0503020202020204" pitchFamily="34" charset="0"/>
               </a:rPr>
-              <a:t>START!</a:t>
+              <a:t>Башта!</a:t>
             </a:r>
           </a:p>
         </p:txBody>
@@ -5757,7 +5757,7 @@
               <a:rPr lang="en-GB" sz="2000" b="1" dirty="0">
                 <a:latin typeface="Agency FB" panose="020B0503020202020204" pitchFamily="34" charset="0"/>
               </a:rPr>
-              <a:t>START!</a:t>
+              <a:t>Башта!</a:t>
             </a:r>
           </a:p>
         </p:txBody>
@@ -5933,7 +5933,7 @@
               <a:rPr lang="en-GB" sz="2000" b="1" dirty="0">
                 <a:latin typeface="Agency FB" panose="020B0503020202020204" pitchFamily="34" charset="0"/>
               </a:rPr>
-              <a:t>START!</a:t>
+              <a:t>Башта!</a:t>
             </a:r>
           </a:p>
         </p:txBody>
@@ -6101,7 +6101,7 @@
               <a:rPr lang="en-GB" sz="2000" b="1" dirty="0">
                 <a:latin typeface="Agency FB" panose="020B0503020202020204" pitchFamily="34" charset="0"/>
               </a:rPr>
-              <a:t>START!</a:t>
+              <a:t>Башта!</a:t>
             </a:r>
           </a:p>
         </p:txBody>
@@ -6277,7 +6277,7 @@
               <a:rPr lang="en-GB" sz="2000" b="1" dirty="0">
                 <a:latin typeface="Agency FB" panose="020B0503020202020204" pitchFamily="34" charset="0"/>
               </a:rPr>
-              <a:t>START!</a:t>
+              <a:t>Башта!</a:t>
             </a:r>
           </a:p>
         </p:txBody>
@@ -6461,7 +6461,7 @@
               <a:rPr lang="en-GB" sz="2000" b="1" dirty="0">
                 <a:latin typeface="Agency FB" panose="020B0503020202020204" pitchFamily="34" charset="0"/>
               </a:rPr>
-              <a:t>START!</a:t>
+              <a:t>Башта!</a:t>
             </a:r>
           </a:p>
         </p:txBody>
@@ -6629,7 +6629,7 @@
               <a:rPr lang="en-GB" sz="2000" b="1" dirty="0">
                 <a:latin typeface="Agency FB" panose="020B0503020202020204" pitchFamily="34" charset="0"/>
               </a:rPr>
-              <a:t>START!</a:t>
+              <a:t>Башта!</a:t>
             </a:r>
           </a:p>
         </p:txBody>
@@ -8500,7 +8500,7 @@
                 <a:ea typeface="+mn-ea"/>
                 <a:cs typeface="+mn-cs"/>
               </a:rPr>
-              <a:t>START!</a:t>
+              <a:t>Башта!</a:t>
             </a:r>
           </a:p>
         </p:txBody>
@@ -8653,7 +8653,7 @@
                 <a:ea typeface="+mn-ea"/>
                 <a:cs typeface="+mn-cs"/>
               </a:rPr>
-              <a:t>START!</a:t>
+              <a:t>Башта!</a:t>
             </a:r>
           </a:p>
         </p:txBody>
@@ -8917,7 +8917,7 @@
                 <a:ea typeface="+mn-ea"/>
                 <a:cs typeface="+mn-cs"/>
               </a:rPr>
-              <a:t>START!</a:t>
+              <a:t>Башта!</a:t>
             </a:r>
           </a:p>
         </p:txBody>
@@ -9192,7 +9192,7 @@
                 <a:ea typeface="+mn-ea"/>
                 <a:cs typeface="+mn-cs"/>
               </a:rPr>
-              <a:t>START!</a:t>
+              <a:t>Башта!</a:t>
             </a:r>
           </a:p>
         </p:txBody>
@@ -9473,7 +9473,7 @@
                 <a:ea typeface="+mn-ea"/>
                 <a:cs typeface="+mn-cs"/>
               </a:rPr>
-              <a:t>START!</a:t>
+              <a:t>Башта!</a:t>
             </a:r>
           </a:p>
         </p:txBody>
@@ -9748,7 +9748,7 @@
                 <a:ea typeface="+mn-ea"/>
                 <a:cs typeface="+mn-cs"/>
               </a:rPr>
-              <a:t>START!</a:t>
+              <a:t>Башта!</a:t>
             </a:r>
           </a:p>
         </p:txBody>
@@ -10012,7 +10012,7 @@
                 <a:ea typeface="+mn-ea"/>
                 <a:cs typeface="+mn-cs"/>
               </a:rPr>
-              <a:t>START!</a:t>
+              <a:t>Башта!</a:t>
             </a:r>
           </a:p>
         </p:txBody>
@@ -10287,7 +10287,7 @@
                 <a:ea typeface="+mn-ea"/>
                 <a:cs typeface="+mn-cs"/>
               </a:rPr>
-              <a:t>START!</a:t>
+              <a:t>Башта!</a:t>
             </a:r>
           </a:p>
         </p:txBody>
@@ -10545,7 +10545,7 @@
                 <a:ea typeface="+mn-ea"/>
                 <a:cs typeface="+mn-cs"/>
               </a:rPr>
-              <a:t>START!</a:t>
+              <a:t>Башта!</a:t>
             </a:r>
           </a:p>
         </p:txBody>
@@ -10820,7 +10820,7 @@
                 <a:ea typeface="+mn-ea"/>
                 <a:cs typeface="+mn-cs"/>
               </a:rPr>
-              <a:t>START!</a:t>
+              <a:t>Башта!</a:t>
             </a:r>
           </a:p>
         </p:txBody>
@@ -11112,7 +11112,7 @@
                 <a:ea typeface="+mn-ea"/>
                 <a:cs typeface="+mn-cs"/>
               </a:rPr>
-              <a:t>START!</a:t>
+              <a:t>Башта!</a:t>
             </a:r>
           </a:p>
         </p:txBody>
@@ -11370,7 +11370,7 @@
                 <a:ea typeface="+mn-ea"/>
                 <a:cs typeface="+mn-cs"/>
               </a:rPr>
-              <a:t>START!</a:t>
+              <a:t>Башта!</a:t>
             </a:r>
           </a:p>
         </p:txBody>
@@ -16030,7 +16030,7 @@
                 <a:ea typeface="+mn-ea"/>
                 <a:cs typeface="+mn-cs"/>
               </a:rPr>
-              <a:t>START!</a:t>
+              <a:t>Башта!</a:t>
             </a:r>
           </a:p>
         </p:txBody>
@@ -16183,7 +16183,7 @@
                 <a:ea typeface="+mn-ea"/>
                 <a:cs typeface="+mn-cs"/>
               </a:rPr>
-              <a:t>START!</a:t>
+              <a:t>Башта!</a:t>
             </a:r>
           </a:p>
         </p:txBody>
@@ -16447,7 +16447,7 @@
                 <a:ea typeface="+mn-ea"/>
                 <a:cs typeface="+mn-cs"/>
               </a:rPr>
-              <a:t>START!</a:t>
+              <a:t>Башта!</a:t>
             </a:r>
           </a:p>
         </p:txBody>
@@ -16722,7 +16722,7 @@
                 <a:ea typeface="+mn-ea"/>
                 <a:cs typeface="+mn-cs"/>
               </a:rPr>
-              <a:t>START!</a:t>
+              <a:t>Башта!</a:t>
             </a:r>
           </a:p>
         </p:txBody>
@@ -17003,7 +17003,7 @@
                 <a:ea typeface="+mn-ea"/>
                 <a:cs typeface="+mn-cs"/>
               </a:rPr>
-              <a:t>START!</a:t>
+              <a:t>Башта!</a:t>
             </a:r>
           </a:p>
         </p:txBody>
@@ -17278,7 +17278,7 @@
                 <a:ea typeface="+mn-ea"/>
                 <a:cs typeface="+mn-cs"/>
               </a:rPr>
-              <a:t>START!</a:t>
+              <a:t>Башта!</a:t>
             </a:r>
           </a:p>
         </p:txBody>
@@ -17542,7 +17542,7 @@
                 <a:ea typeface="+mn-ea"/>
                 <a:cs typeface="+mn-cs"/>
               </a:rPr>
-              <a:t>START!</a:t>
+              <a:t>Башта!</a:t>
             </a:r>
           </a:p>
         </p:txBody>
@@ -17817,7 +17817,7 @@
                 <a:ea typeface="+mn-ea"/>
                 <a:cs typeface="+mn-cs"/>
               </a:rPr>
-              <a:t>START!</a:t>
+              <a:t>Башта!</a:t>
             </a:r>
           </a:p>
         </p:txBody>
@@ -18081,7 +18081,7 @@
                 <a:ea typeface="+mn-ea"/>
                 <a:cs typeface="+mn-cs"/>
               </a:rPr>
-              <a:t>START!</a:t>
+              <a:t>Башта!</a:t>
             </a:r>
           </a:p>
         </p:txBody>
@@ -18356,7 +18356,7 @@
                 <a:ea typeface="+mn-ea"/>
                 <a:cs typeface="+mn-cs"/>
               </a:rPr>
-              <a:t>START!</a:t>
+              <a:t>Башта!</a:t>
             </a:r>
           </a:p>
         </p:txBody>
@@ -18648,7 +18648,7 @@
                 <a:ea typeface="+mn-ea"/>
                 <a:cs typeface="+mn-cs"/>
               </a:rPr>
-              <a:t>START!</a:t>
+              <a:t>Башта!</a:t>
             </a:r>
           </a:p>
         </p:txBody>
@@ -18912,7 +18912,7 @@
                 <a:ea typeface="+mn-ea"/>
                 <a:cs typeface="+mn-cs"/>
               </a:rPr>
-              <a:t>START!</a:t>
+              <a:t>Башта!</a:t>
             </a:r>
           </a:p>
         </p:txBody>
@@ -23529,7 +23529,7 @@
                 <a:ea typeface="+mn-ea"/>
                 <a:cs typeface="+mn-cs"/>
               </a:rPr>
-              <a:t>Турдуу пикирлер учун ыраазычылык билдиребиз.</a:t>
+              <a:t>Түрдүү пикирлер үчүн ыраазычылык билдиребиз.</a:t>
             </a:r>
           </a:p>
           <a:p>

--- a/media/resources/files/Onduktar_Akcha_KalkulyatorsuzIshtoo_JooptorLabyrynthi.pptx
+++ b/media/resources/files/Onduktar_Akcha_KalkulyatorsuzIshtoo_JooptorLabyrynthi.pptx
@@ -5018,7 +5018,7 @@
                   <a:schemeClr val="tx1"/>
                 </a:solidFill>
               </a:rPr>
-              <a:t>9.5 сом </a:t>
+              <a:t>9,5 сом </a:t>
             </a:r>
             <a:endParaRPr lang="en-GB" sz="1950" dirty="0">
               <a:solidFill>
@@ -5186,7 +5186,7 @@
                   <a:schemeClr val="tx1"/>
                 </a:solidFill>
               </a:rPr>
-              <a:t>1506.99</a:t>
+              <a:t>1506,99</a:t>
             </a:r>
             <a:r>
               <a:rPr lang="ky-KG" sz="1950" dirty="0">
@@ -5362,7 +5362,7 @@
                   <a:schemeClr val="tx1"/>
                 </a:solidFill>
               </a:rPr>
-              <a:t>1,072.4</a:t>
+              <a:t>1 072,4</a:t>
             </a:r>
             <a:r>
               <a:rPr lang="ky-KG" sz="2000" dirty="0">
@@ -5538,7 +5538,7 @@
                   <a:schemeClr val="tx1"/>
                 </a:solidFill>
               </a:rPr>
-              <a:t>1044.99</a:t>
+              <a:t>1044,99</a:t>
             </a:r>
             <a:r>
               <a:rPr lang="ky-KG" sz="1950" dirty="0">
@@ -5714,7 +5714,7 @@
                   <a:schemeClr val="tx1"/>
                 </a:solidFill>
               </a:rPr>
-              <a:t>443.80 сом</a:t>
+              <a:t>443,80 сом</a:t>
             </a:r>
             <a:endParaRPr lang="en-GB" sz="1950" dirty="0">
               <a:solidFill>
@@ -5882,7 +5882,7 @@
                   <a:schemeClr val="tx1"/>
                 </a:solidFill>
               </a:rPr>
-              <a:t>81.40</a:t>
+              <a:t>81,40</a:t>
             </a:r>
             <a:r>
               <a:rPr lang="ky-KG" sz="1950" dirty="0">
@@ -6058,7 +6058,7 @@
                   <a:schemeClr val="tx1"/>
                 </a:solidFill>
               </a:rPr>
-              <a:t>1402.5сом</a:t>
+              <a:t>1402,5сом</a:t>
             </a:r>
             <a:endParaRPr lang="en-GB" sz="1950" dirty="0">
               <a:solidFill>
@@ -6226,7 +6226,7 @@
                   <a:schemeClr val="tx1"/>
                 </a:solidFill>
               </a:rPr>
-              <a:t>132.00</a:t>
+              <a:t>132,00</a:t>
             </a:r>
             <a:r>
               <a:rPr lang="ky-KG" sz="1950" dirty="0">
@@ -6410,7 +6410,7 @@
                   <a:schemeClr val="tx1"/>
                 </a:solidFill>
               </a:rPr>
-              <a:t>973.95</a:t>
+              <a:t>973,95</a:t>
             </a:r>
             <a:r>
               <a:rPr lang="ky-KG" sz="1950" dirty="0">
@@ -6586,7 +6586,7 @@
                   <a:schemeClr val="tx1"/>
                 </a:solidFill>
               </a:rPr>
-              <a:t>1614.79 сом</a:t>
+              <a:t>1614,79 сом</a:t>
             </a:r>
             <a:endParaRPr lang="en-GB" sz="1950" dirty="0">
               <a:solidFill>
@@ -6754,7 +6754,7 @@
                   <a:schemeClr val="tx1"/>
                 </a:solidFill>
               </a:rPr>
-              <a:t>66.5сом</a:t>
+              <a:t>66,5сом</a:t>
             </a:r>
             <a:endParaRPr lang="en-GB" sz="1950" dirty="0">
               <a:solidFill>
@@ -6900,14 +6900,14 @@
             <a:pPr algn="ctr"/>
             <a:r>
               <a:rPr lang="ru-RU" sz="1600" dirty="0"/>
-              <a:t>123.20 сом</a:t>
+              <a:t>123,20 сом</a:t>
             </a:r>
           </a:p>
           <a:p>
             <a:pPr algn="ctr"/>
             <a:r>
               <a:rPr lang="ru-RU" sz="1600" dirty="0"/>
-              <a:t>15 колбаса 351.40сом </a:t>
+              <a:t>15 колбаса 351,40сом </a:t>
             </a:r>
           </a:p>
           <a:p>
@@ -6972,7 +6972,7 @@
             <a:pPr algn="ctr"/>
             <a:r>
               <a:rPr lang="ru-RU" sz="1600" dirty="0"/>
-              <a:t>бири 269.50 сом.</a:t>
+              <a:t>бири 269,50 сом.</a:t>
             </a:r>
           </a:p>
           <a:p>
@@ -6986,7 +6986,7 @@
             <a:pPr algn="ctr"/>
             <a:r>
               <a:rPr lang="ru-RU" sz="1600" dirty="0"/>
-              <a:t> бири 150.50 сом.</a:t>
+              <a:t> бири 150,50 сом.</a:t>
             </a:r>
           </a:p>
           <a:p>
@@ -7044,14 +7044,14 @@
             <a:pPr algn="ctr"/>
             <a:r>
               <a:rPr lang="ru-RU" sz="1600" dirty="0"/>
-              <a:t>Чоңдорго билет: 120.60</a:t>
+              <a:t>Чоңдорго билет: 120,60</a:t>
             </a:r>
           </a:p>
           <a:p>
             <a:pPr algn="ctr"/>
             <a:r>
               <a:rPr lang="ru-RU" sz="1600" dirty="0"/>
-              <a:t>Бала билети: 80.80сом</a:t>
+              <a:t>Бала билети: 80,80сом</a:t>
             </a:r>
           </a:p>
           <a:p>
@@ -7120,7 +7120,7 @@
             <a:pPr algn="ctr"/>
             <a:r>
               <a:rPr lang="en-US" sz="1600" dirty="0"/>
-              <a:t>467.50</a:t>
+              <a:t>467,50</a:t>
             </a:r>
             <a:r>
               <a:rPr lang="ky-KG" sz="1600" dirty="0"/>
@@ -7131,7 +7131,7 @@
             <a:pPr algn="ctr"/>
             <a:r>
               <a:rPr lang="ky-KG" sz="1600" dirty="0"/>
-              <a:t>таңгагы 357.50 сом .</a:t>
+              <a:t>таңгагы 357,50 сом .</a:t>
             </a:r>
           </a:p>
           <a:p>
@@ -7198,21 +7198,21 @@
             <a:pPr algn="ctr"/>
             <a:r>
               <a:rPr lang="ru-RU" sz="1600" dirty="0"/>
-              <a:t>Чоңдорго билет: 235.77 с</a:t>
+              <a:t>Чоңдорго билет: 235,77 с</a:t>
             </a:r>
           </a:p>
           <a:p>
             <a:pPr algn="ctr"/>
             <a:r>
               <a:rPr lang="ru-RU" sz="1600" dirty="0"/>
-              <a:t>Балдар билети: 105.99 с</a:t>
+              <a:t>Балдар билети: 105,99 с</a:t>
             </a:r>
           </a:p>
           <a:p>
             <a:pPr algn="ctr"/>
             <a:r>
               <a:rPr lang="ru-RU" sz="1600" dirty="0"/>
-              <a:t>Топтук билет: 583.52 с</a:t>
+              <a:t>Топтук билет: 583,52 с</a:t>
             </a:r>
           </a:p>
           <a:p>
@@ -7281,7 +7281,7 @@
             <a:pPr algn="ctr"/>
             <a:r>
               <a:rPr lang="ky-KG" sz="1600" dirty="0"/>
-              <a:t>ар бири 159.50 с</a:t>
+              <a:t>ар бири 159,50 с</a:t>
             </a:r>
           </a:p>
           <a:p>
@@ -7295,7 +7295,7 @@
             <a:pPr algn="ctr"/>
             <a:r>
               <a:rPr lang="ky-KG" sz="1600" dirty="0"/>
-              <a:t>ар бири 192.50с.</a:t>
+              <a:t>ар бири 192,50с.</a:t>
             </a:r>
           </a:p>
           <a:p>
@@ -7375,7 +7375,7 @@
             <a:pPr algn="ctr"/>
             <a:r>
               <a:rPr lang="ky-KG" sz="1600" dirty="0"/>
-              <a:t> таңгак 714.99 сом ЖЕ</a:t>
+              <a:t> таңгак 714,99 сом ЖЕ</a:t>
             </a:r>
           </a:p>
           <a:p>
@@ -7389,7 +7389,7 @@
             <a:pPr algn="ctr"/>
             <a:r>
               <a:rPr lang="ky-KG" sz="1600" dirty="0"/>
-              <a:t>таңгак 473.00 сом</a:t>
+              <a:t>таңгак 473,00 сом</a:t>
             </a:r>
           </a:p>
           <a:p>
@@ -7461,7 +7461,7 @@
             <a:pPr algn="ctr"/>
             <a:r>
               <a:rPr lang="ru-RU" sz="1600" dirty="0"/>
-              <a:t>бири 247.50 сом.</a:t>
+              <a:t>бири 247,50 сом.</a:t>
             </a:r>
           </a:p>
           <a:p>
@@ -7475,7 +7475,7 @@
             <a:pPr algn="ctr"/>
             <a:r>
               <a:rPr lang="ru-RU" sz="1600" dirty="0"/>
-              <a:t>бири 95.70 сом.</a:t>
+              <a:t>бири 95,70 сом.</a:t>
             </a:r>
           </a:p>
           <a:p>
@@ -7533,21 +7533,21 @@
             <a:pPr algn="ctr"/>
             <a:r>
               <a:rPr lang="ru-RU" sz="1600" dirty="0"/>
-              <a:t>Чоңдорго билет: 478.50с</a:t>
+              <a:t>Чоңдорго билет: 478,50с</a:t>
             </a:r>
           </a:p>
           <a:p>
             <a:pPr algn="ctr"/>
             <a:r>
               <a:rPr lang="ru-RU" sz="1600" dirty="0"/>
-              <a:t>Балдар билети: 275.00с</a:t>
+              <a:t>Балдар билети: 275,00с</a:t>
             </a:r>
           </a:p>
           <a:p>
             <a:pPr algn="ctr"/>
             <a:r>
               <a:rPr lang="ru-RU" sz="1600" dirty="0"/>
-              <a:t>Топтук билет: 1979.99с </a:t>
+              <a:t>Топтук билет: 1979,99с </a:t>
             </a:r>
           </a:p>
           <a:p>
@@ -7612,7 +7612,7 @@
             <a:pPr algn="ctr"/>
             <a:r>
               <a:rPr lang="ky-KG" sz="1600" dirty="0"/>
-              <a:t>2 картошка: 20.70 с</a:t>
+              <a:t>2 картошка: 20,70 с</a:t>
             </a:r>
             <a:r>
               <a:rPr lang="en-GB" sz="1600" dirty="0"/>
@@ -7627,7 +7627,7 @@
             <a:pPr algn="ctr"/>
             <a:r>
               <a:rPr lang="ky-KG" sz="1600" dirty="0"/>
-              <a:t>4 филе: ар бири 294.80с</a:t>
+              <a:t>4 филе: ар бири 294,80с</a:t>
             </a:r>
           </a:p>
           <a:p>
@@ -7697,14 +7697,14 @@
             <a:pPr algn="ctr"/>
             <a:r>
               <a:rPr lang="ru-RU" sz="1600" dirty="0"/>
-              <a:t>Чоңдорго билет: 500.50 с</a:t>
+              <a:t>Чоңдорго билет: 500,50 с</a:t>
             </a:r>
           </a:p>
           <a:p>
             <a:pPr algn="ctr"/>
             <a:r>
               <a:rPr lang="ru-RU" sz="1600" dirty="0"/>
-              <a:t>Балдар билети: 302.50 с</a:t>
+              <a:t>Балдар билети: 302,50 с</a:t>
             </a:r>
           </a:p>
           <a:p>
@@ -8838,7 +8838,7 @@
                 <a:ea typeface="+mn-ea"/>
                 <a:cs typeface="+mn-cs"/>
               </a:rPr>
-              <a:t>9.5 сом </a:t>
+              <a:t>9,5 сом </a:t>
             </a:r>
             <a:endParaRPr kumimoji="0" lang="en-GB" sz="1950" b="0" i="0" u="none" strike="noStrike" kern="1200" cap="none" spc="0" normalizeH="0" baseline="0" noProof="0" dirty="0">
               <a:ln>
@@ -9096,7 +9096,7 @@
                 <a:ea typeface="+mn-ea"/>
                 <a:cs typeface="+mn-cs"/>
               </a:rPr>
-              <a:t>1506.99</a:t>
+              <a:t>1506,99</a:t>
             </a:r>
             <a:r>
               <a:rPr kumimoji="0" lang="ky-KG" sz="1950" b="0" i="0" u="none" strike="noStrike" kern="1200" cap="none" spc="0" normalizeH="0" baseline="0" noProof="0" dirty="0">
@@ -9377,7 +9377,7 @@
                 <a:ea typeface="+mn-ea"/>
                 <a:cs typeface="+mn-cs"/>
               </a:rPr>
-              <a:t>1,072.4</a:t>
+              <a:t>1 072,4</a:t>
             </a:r>
             <a:r>
               <a:rPr kumimoji="0" lang="ky-KG" sz="2000" b="0" i="0" u="none" strike="noStrike" kern="1200" cap="none" spc="0" normalizeH="0" baseline="0" noProof="0" dirty="0">
@@ -9652,7 +9652,7 @@
                 <a:ea typeface="+mn-ea"/>
                 <a:cs typeface="+mn-cs"/>
               </a:rPr>
-              <a:t>1044.99</a:t>
+              <a:t>1044,99</a:t>
             </a:r>
             <a:r>
               <a:rPr kumimoji="0" lang="ky-KG" sz="1950" b="0" i="0" u="none" strike="noStrike" kern="1200" cap="none" spc="0" normalizeH="0" baseline="0" noProof="0" dirty="0">
@@ -9933,7 +9933,7 @@
                 <a:ea typeface="+mn-ea"/>
                 <a:cs typeface="+mn-cs"/>
               </a:rPr>
-              <a:t>443.80 сом</a:t>
+              <a:t>443,80 сом</a:t>
             </a:r>
             <a:endParaRPr kumimoji="0" lang="en-GB" sz="1950" b="0" i="0" u="none" strike="noStrike" kern="1200" cap="none" spc="0" normalizeH="0" baseline="0" noProof="0" dirty="0">
               <a:ln>
@@ -10191,7 +10191,7 @@
                 <a:ea typeface="+mn-ea"/>
                 <a:cs typeface="+mn-cs"/>
               </a:rPr>
-              <a:t>81.40</a:t>
+              <a:t>81,40</a:t>
             </a:r>
             <a:r>
               <a:rPr kumimoji="0" lang="ky-KG" sz="1950" b="0" i="0" u="none" strike="noStrike" kern="1200" cap="none" spc="0" normalizeH="0" baseline="0" noProof="0" dirty="0">
@@ -10466,7 +10466,7 @@
                 <a:ea typeface="+mn-ea"/>
                 <a:cs typeface="+mn-cs"/>
               </a:rPr>
-              <a:t>1402.5</a:t>
+              <a:t>1402,5</a:t>
             </a:r>
             <a:endParaRPr kumimoji="0" lang="en-GB" sz="1950" b="0" i="0" u="none" strike="noStrike" kern="1200" cap="none" spc="0" normalizeH="0" baseline="0" noProof="0" dirty="0">
               <a:ln>
@@ -10724,7 +10724,7 @@
                 <a:ea typeface="+mn-ea"/>
                 <a:cs typeface="+mn-cs"/>
               </a:rPr>
-              <a:t>132.00</a:t>
+              <a:t>132,00</a:t>
             </a:r>
             <a:r>
               <a:rPr kumimoji="0" lang="ky-KG" sz="1950" b="0" i="0" u="none" strike="noStrike" kern="1200" cap="none" spc="0" normalizeH="0" baseline="0" noProof="0" dirty="0">
@@ -11016,7 +11016,7 @@
                 <a:ea typeface="+mn-ea"/>
                 <a:cs typeface="+mn-cs"/>
               </a:rPr>
-              <a:t>973.95</a:t>
+              <a:t>973,95</a:t>
             </a:r>
             <a:r>
               <a:rPr kumimoji="0" lang="ky-KG" sz="1950" b="0" i="0" u="none" strike="noStrike" kern="1200" cap="none" spc="0" normalizeH="0" baseline="0" noProof="0" dirty="0">
@@ -11291,7 +11291,7 @@
                 <a:ea typeface="+mn-ea"/>
                 <a:cs typeface="+mn-cs"/>
               </a:rPr>
-              <a:t>1614.79 сом</a:t>
+              <a:t>1614,79 сом</a:t>
             </a:r>
             <a:endParaRPr kumimoji="0" lang="en-GB" sz="1950" b="0" i="0" u="none" strike="noStrike" kern="1200" cap="none" spc="0" normalizeH="0" baseline="0" noProof="0" dirty="0">
               <a:ln>
@@ -11549,7 +11549,7 @@
                 <a:ea typeface="+mn-ea"/>
                 <a:cs typeface="+mn-cs"/>
               </a:rPr>
-              <a:t>66.5сом</a:t>
+              <a:t>66,5сом</a:t>
             </a:r>
             <a:endParaRPr kumimoji="0" lang="en-GB" sz="1950" b="0" i="0" u="none" strike="noStrike" kern="1200" cap="none" spc="0" normalizeH="0" baseline="0" noProof="0" dirty="0">
               <a:ln>
@@ -11860,7 +11860,7 @@
                 <a:ea typeface="+mn-ea"/>
                 <a:cs typeface="+mn-cs"/>
               </a:rPr>
-              <a:t>123.20 сом</a:t>
+              <a:t>123,20 сом</a:t>
             </a:r>
           </a:p>
           <a:p>
@@ -11896,7 +11896,7 @@
                 <a:ea typeface="+mn-ea"/>
                 <a:cs typeface="+mn-cs"/>
               </a:rPr>
-              <a:t>15 колбаса 351.40сом </a:t>
+              <a:t>15 колбаса 351,40сом </a:t>
             </a:r>
           </a:p>
           <a:p>
@@ -12119,7 +12119,7 @@
                 <a:ea typeface="+mn-ea"/>
                 <a:cs typeface="+mn-cs"/>
               </a:rPr>
-              <a:t>бири 269.50 сом.</a:t>
+              <a:t>бири 269,50 сом.</a:t>
             </a:r>
           </a:p>
           <a:p>
@@ -12191,7 +12191,7 @@
                 <a:ea typeface="+mn-ea"/>
                 <a:cs typeface="+mn-cs"/>
               </a:rPr>
-              <a:t> бири 150.50 сом.</a:t>
+              <a:t> бири 150,50 сом.</a:t>
             </a:r>
           </a:p>
           <a:p>
@@ -12378,7 +12378,7 @@
                 <a:ea typeface="+mn-ea"/>
                 <a:cs typeface="+mn-cs"/>
               </a:rPr>
-              <a:t>Чоңдорго билет: 120.60</a:t>
+              <a:t>Чоңдорго билет: 120,60</a:t>
             </a:r>
           </a:p>
           <a:p>
@@ -12414,7 +12414,7 @@
                 <a:ea typeface="+mn-ea"/>
                 <a:cs typeface="+mn-cs"/>
               </a:rPr>
-              <a:t>Бала билети: 80.80сом</a:t>
+              <a:t>Бала билети: 80,80сом</a:t>
             </a:r>
           </a:p>
           <a:p>
@@ -12670,7 +12670,7 @@
                 <a:ea typeface="+mn-ea"/>
                 <a:cs typeface="+mn-cs"/>
               </a:rPr>
-              <a:t>467.50</a:t>
+              <a:t>467,50</a:t>
             </a:r>
             <a:r>
               <a:rPr kumimoji="0" lang="ky-KG" sz="1600" b="0" i="0" u="none" strike="noStrike" kern="1200" cap="none" spc="0" normalizeH="0" baseline="0" noProof="0" dirty="0">
@@ -12723,7 +12723,7 @@
                 <a:ea typeface="+mn-ea"/>
                 <a:cs typeface="+mn-cs"/>
               </a:rPr>
-              <a:t>таңгагы 357.50 сом .</a:t>
+              <a:t>таңгагы 357,50 сом .</a:t>
             </a:r>
           </a:p>
           <a:p>
@@ -12974,7 +12974,7 @@
                 <a:ea typeface="+mn-ea"/>
                 <a:cs typeface="+mn-cs"/>
               </a:rPr>
-              <a:t>Чоңдорго билет: 235.77 с</a:t>
+              <a:t>Чоңдорго билет: 235,77 с</a:t>
             </a:r>
           </a:p>
           <a:p>
@@ -13010,7 +13010,7 @@
                 <a:ea typeface="+mn-ea"/>
                 <a:cs typeface="+mn-cs"/>
               </a:rPr>
-              <a:t>Балдар билети: 105.99 с</a:t>
+              <a:t>Балдар билети: 105,99 с</a:t>
             </a:r>
           </a:p>
           <a:p>
@@ -13046,7 +13046,7 @@
                 <a:ea typeface="+mn-ea"/>
                 <a:cs typeface="+mn-cs"/>
               </a:rPr>
-              <a:t>Топтук билет: 583.52 с</a:t>
+              <a:t>Топтук билет: 583,52 с</a:t>
             </a:r>
           </a:p>
           <a:p>
@@ -13302,7 +13302,7 @@
                 <a:ea typeface="+mn-ea"/>
                 <a:cs typeface="+mn-cs"/>
               </a:rPr>
-              <a:t>ар бири 159.50 с</a:t>
+              <a:t>ар бири 159,50 с</a:t>
             </a:r>
           </a:p>
           <a:p>
@@ -13374,7 +13374,7 @@
                 <a:ea typeface="+mn-ea"/>
                 <a:cs typeface="+mn-cs"/>
               </a:rPr>
-              <a:t>ар бири 192.50с.</a:t>
+              <a:t>ар бири 192,50с.</a:t>
             </a:r>
           </a:p>
           <a:p>
@@ -13667,7 +13667,7 @@
                 <a:ea typeface="+mn-ea"/>
                 <a:cs typeface="+mn-cs"/>
               </a:rPr>
-              <a:t> таңгак 714.99 сом ЖЕ</a:t>
+              <a:t> таңгак 714,99 сом ЖЕ</a:t>
             </a:r>
           </a:p>
           <a:p>
@@ -13739,7 +13739,7 @@
                 <a:ea typeface="+mn-ea"/>
                 <a:cs typeface="+mn-cs"/>
               </a:rPr>
-              <a:t>таңгак 473.00 сом</a:t>
+              <a:t>таңгак 473,00 сом</a:t>
             </a:r>
           </a:p>
           <a:p>
@@ -13998,7 +13998,7 @@
                 <a:ea typeface="+mn-ea"/>
                 <a:cs typeface="+mn-cs"/>
               </a:rPr>
-              <a:t>бири 247.50 сом.</a:t>
+              <a:t>бири 247,50 сом.</a:t>
             </a:r>
           </a:p>
           <a:p>
@@ -14070,7 +14070,7 @@
                 <a:ea typeface="+mn-ea"/>
                 <a:cs typeface="+mn-cs"/>
               </a:rPr>
-              <a:t>бири 95.70 сом.</a:t>
+              <a:t>бири 95,70 сом.</a:t>
             </a:r>
           </a:p>
           <a:p>
@@ -14257,7 +14257,7 @@
                 <a:ea typeface="+mn-ea"/>
                 <a:cs typeface="+mn-cs"/>
               </a:rPr>
-              <a:t>Чоңдорго билет: 478.50с</a:t>
+              <a:t>Чоңдорго билет: 478,50с</a:t>
             </a:r>
           </a:p>
           <a:p>
@@ -14293,7 +14293,7 @@
                 <a:ea typeface="+mn-ea"/>
                 <a:cs typeface="+mn-cs"/>
               </a:rPr>
-              <a:t>Балдар билети: 275.00с</a:t>
+              <a:t>Балдар билети: 275,00с</a:t>
             </a:r>
           </a:p>
           <a:p>
@@ -14329,7 +14329,7 @@
                 <a:ea typeface="+mn-ea"/>
                 <a:cs typeface="+mn-cs"/>
               </a:rPr>
-              <a:t>Топтук билет: 1979.99с </a:t>
+              <a:t>Топтук билет: 1979,99с </a:t>
             </a:r>
           </a:p>
           <a:p>
@@ -14552,7 +14552,7 @@
                 <a:ea typeface="+mn-ea"/>
                 <a:cs typeface="+mn-cs"/>
               </a:rPr>
-              <a:t>2 картошка: 20.70 с</a:t>
+              <a:t>2 картошка: 20,70 с</a:t>
             </a:r>
             <a:r>
               <a:rPr kumimoji="0" lang="en-GB" sz="1600" b="0" i="0" u="none" strike="noStrike" kern="1200" cap="none" spc="0" normalizeH="0" baseline="0" noProof="0" dirty="0">
@@ -14622,7 +14622,7 @@
                 <a:ea typeface="+mn-ea"/>
                 <a:cs typeface="+mn-cs"/>
               </a:rPr>
-              <a:t>4 филе: ар бири 294.80с</a:t>
+              <a:t>4 филе: ар бири 294,80с</a:t>
             </a:r>
           </a:p>
           <a:p>
@@ -14892,7 +14892,7 @@
                 <a:ea typeface="+mn-ea"/>
                 <a:cs typeface="+mn-cs"/>
               </a:rPr>
-              <a:t>Чоңдорго билет: 500.50 с</a:t>
+              <a:t>Чоңдорго билет: 500,50 с</a:t>
             </a:r>
           </a:p>
           <a:p>
@@ -14928,7 +14928,7 @@
                 <a:ea typeface="+mn-ea"/>
                 <a:cs typeface="+mn-cs"/>
               </a:rPr>
-              <a:t>Балдар билети: 302.50 с</a:t>
+              <a:t>Балдар билети: 302,50 с</a:t>
             </a:r>
           </a:p>
           <a:p>
@@ -16368,7 +16368,7 @@
                 <a:ea typeface="+mn-ea"/>
                 <a:cs typeface="+mn-cs"/>
               </a:rPr>
-              <a:t>9.5 сом </a:t>
+              <a:t>9,5 сом </a:t>
             </a:r>
             <a:endParaRPr kumimoji="0" lang="en-GB" sz="1950" b="0" i="0" u="none" strike="noStrike" kern="1200" cap="none" spc="0" normalizeH="0" baseline="0" noProof="0" dirty="0">
               <a:ln>
@@ -16626,7 +16626,7 @@
                 <a:ea typeface="+mn-ea"/>
                 <a:cs typeface="+mn-cs"/>
               </a:rPr>
-              <a:t>1506.99</a:t>
+              <a:t>1506,99</a:t>
             </a:r>
             <a:r>
               <a:rPr kumimoji="0" lang="ky-KG" sz="1950" b="0" i="0" u="none" strike="noStrike" kern="1200" cap="none" spc="0" normalizeH="0" baseline="0" noProof="0" dirty="0">
@@ -16907,7 +16907,7 @@
                 <a:ea typeface="+mn-ea"/>
                 <a:cs typeface="+mn-cs"/>
               </a:rPr>
-              <a:t>1,072.4</a:t>
+              <a:t>1 072,4</a:t>
             </a:r>
             <a:r>
               <a:rPr kumimoji="0" lang="ky-KG" sz="2000" b="0" i="0" u="none" strike="noStrike" kern="1200" cap="none" spc="0" normalizeH="0" baseline="0" noProof="0" dirty="0">
@@ -17182,7 +17182,7 @@
                 <a:ea typeface="+mn-ea"/>
                 <a:cs typeface="+mn-cs"/>
               </a:rPr>
-              <a:t>1044.99</a:t>
+              <a:t>1044,99</a:t>
             </a:r>
             <a:r>
               <a:rPr kumimoji="0" lang="ky-KG" sz="1950" b="0" i="0" u="none" strike="noStrike" kern="1200" cap="none" spc="0" normalizeH="0" baseline="0" noProof="0" dirty="0">
@@ -17463,7 +17463,7 @@
                 <a:ea typeface="+mn-ea"/>
                 <a:cs typeface="+mn-cs"/>
               </a:rPr>
-              <a:t>443.80 сом</a:t>
+              <a:t>443,80 сом</a:t>
             </a:r>
             <a:endParaRPr kumimoji="0" lang="en-GB" sz="1950" b="0" i="0" u="none" strike="noStrike" kern="1200" cap="none" spc="0" normalizeH="0" baseline="0" noProof="0" dirty="0">
               <a:ln>
@@ -17721,7 +17721,7 @@
                 <a:ea typeface="+mn-ea"/>
                 <a:cs typeface="+mn-cs"/>
               </a:rPr>
-              <a:t>81.40</a:t>
+              <a:t>81,40</a:t>
             </a:r>
             <a:r>
               <a:rPr kumimoji="0" lang="ky-KG" sz="1950" b="0" i="0" u="none" strike="noStrike" kern="1200" cap="none" spc="0" normalizeH="0" baseline="0" noProof="0" dirty="0">
@@ -18002,7 +18002,7 @@
                 <a:ea typeface="+mn-ea"/>
                 <a:cs typeface="+mn-cs"/>
               </a:rPr>
-              <a:t>1402.5</a:t>
+              <a:t>1402,5</a:t>
             </a:r>
             <a:endParaRPr kumimoji="0" lang="en-GB" sz="1950" b="0" i="0" u="none" strike="noStrike" kern="1200" cap="none" spc="0" normalizeH="0" baseline="0" noProof="0" dirty="0">
               <a:ln>
@@ -18260,7 +18260,7 @@
                 <a:ea typeface="+mn-ea"/>
                 <a:cs typeface="+mn-cs"/>
               </a:rPr>
-              <a:t>132.00</a:t>
+              <a:t>132,00</a:t>
             </a:r>
             <a:r>
               <a:rPr kumimoji="0" lang="ky-KG" sz="1950" b="0" i="0" u="none" strike="noStrike" kern="1200" cap="none" spc="0" normalizeH="0" baseline="0" noProof="0" dirty="0">
@@ -18552,7 +18552,7 @@
                 <a:ea typeface="+mn-ea"/>
                 <a:cs typeface="+mn-cs"/>
               </a:rPr>
-              <a:t>973.95</a:t>
+              <a:t>973,95</a:t>
             </a:r>
             <a:r>
               <a:rPr kumimoji="0" lang="ky-KG" sz="1950" b="0" i="0" u="none" strike="noStrike" kern="1200" cap="none" spc="0" normalizeH="0" baseline="0" noProof="0" dirty="0">
@@ -18833,7 +18833,7 @@
                 <a:ea typeface="+mn-ea"/>
                 <a:cs typeface="+mn-cs"/>
               </a:rPr>
-              <a:t>1614.79 сом</a:t>
+              <a:t>1614,79 сом</a:t>
             </a:r>
             <a:endParaRPr kumimoji="0" lang="en-GB" sz="1950" b="0" i="0" u="none" strike="noStrike" kern="1200" cap="none" spc="0" normalizeH="0" baseline="0" noProof="0" dirty="0">
               <a:ln>
@@ -19097,7 +19097,7 @@
                 <a:ea typeface="+mn-ea"/>
                 <a:cs typeface="+mn-cs"/>
               </a:rPr>
-              <a:t>66.5сом</a:t>
+              <a:t>66,5сом</a:t>
             </a:r>
             <a:endParaRPr kumimoji="0" lang="en-GB" sz="1950" b="0" i="0" u="none" strike="noStrike" kern="1200" cap="none" spc="0" normalizeH="0" baseline="0" noProof="0" dirty="0">
               <a:ln>
@@ -19408,7 +19408,7 @@
                 <a:ea typeface="+mn-ea"/>
                 <a:cs typeface="+mn-cs"/>
               </a:rPr>
-              <a:t>123.20 сом</a:t>
+              <a:t>123,20 сом</a:t>
             </a:r>
           </a:p>
           <a:p>
@@ -19444,7 +19444,7 @@
                 <a:ea typeface="+mn-ea"/>
                 <a:cs typeface="+mn-cs"/>
               </a:rPr>
-              <a:t>15 колбаса 351.40сом </a:t>
+              <a:t>15 колбаса 351,40сом </a:t>
             </a:r>
           </a:p>
           <a:p>
@@ -19667,7 +19667,7 @@
                 <a:ea typeface="+mn-ea"/>
                 <a:cs typeface="+mn-cs"/>
               </a:rPr>
-              <a:t>бири 269.50 сом.</a:t>
+              <a:t>бири 269,50 сом.</a:t>
             </a:r>
           </a:p>
           <a:p>
@@ -19739,7 +19739,7 @@
                 <a:ea typeface="+mn-ea"/>
                 <a:cs typeface="+mn-cs"/>
               </a:rPr>
-              <a:t> бири 150.50 сом.</a:t>
+              <a:t> бири 150,50 сом.</a:t>
             </a:r>
           </a:p>
           <a:p>
@@ -19926,7 +19926,7 @@
                 <a:ea typeface="+mn-ea"/>
                 <a:cs typeface="+mn-cs"/>
               </a:rPr>
-              <a:t>Чоңдорго билет: 120.60</a:t>
+              <a:t>Чоңдорго билет: 120,60</a:t>
             </a:r>
           </a:p>
           <a:p>
@@ -19962,7 +19962,7 @@
                 <a:ea typeface="+mn-ea"/>
                 <a:cs typeface="+mn-cs"/>
               </a:rPr>
-              <a:t>Бала билети: 80.80сом</a:t>
+              <a:t>Бала билети: 80,80сом</a:t>
             </a:r>
           </a:p>
           <a:p>
@@ -20218,7 +20218,7 @@
                 <a:ea typeface="+mn-ea"/>
                 <a:cs typeface="+mn-cs"/>
               </a:rPr>
-              <a:t>467.50</a:t>
+              <a:t>467,50</a:t>
             </a:r>
             <a:r>
               <a:rPr kumimoji="0" lang="ky-KG" sz="1600" b="0" i="0" u="none" strike="noStrike" kern="1200" cap="none" spc="0" normalizeH="0" baseline="0" noProof="0" dirty="0">
@@ -20271,7 +20271,7 @@
                 <a:ea typeface="+mn-ea"/>
                 <a:cs typeface="+mn-cs"/>
               </a:rPr>
-              <a:t>таңгагы 357.50 сом .</a:t>
+              <a:t>таңгагы 357,50 сом .</a:t>
             </a:r>
           </a:p>
           <a:p>
@@ -20522,7 +20522,7 @@
                 <a:ea typeface="+mn-ea"/>
                 <a:cs typeface="+mn-cs"/>
               </a:rPr>
-              <a:t>Чоңдорго билет: 235.77 с</a:t>
+              <a:t>Чоңдорго билет: 235,77 с</a:t>
             </a:r>
           </a:p>
           <a:p>
@@ -20558,7 +20558,7 @@
                 <a:ea typeface="+mn-ea"/>
                 <a:cs typeface="+mn-cs"/>
               </a:rPr>
-              <a:t>Балдар билети: 105.99 с</a:t>
+              <a:t>Балдар билети: 105,99 с</a:t>
             </a:r>
           </a:p>
           <a:p>
@@ -20594,7 +20594,7 @@
                 <a:ea typeface="+mn-ea"/>
                 <a:cs typeface="+mn-cs"/>
               </a:rPr>
-              <a:t>Топтук билет: 583.52 с</a:t>
+              <a:t>Топтук билет: 583,52 с</a:t>
             </a:r>
           </a:p>
           <a:p>
@@ -20850,7 +20850,7 @@
                 <a:ea typeface="+mn-ea"/>
                 <a:cs typeface="+mn-cs"/>
               </a:rPr>
-              <a:t>ар бири 159.50 с</a:t>
+              <a:t>ар бири 159,50 с</a:t>
             </a:r>
           </a:p>
           <a:p>
@@ -20922,7 +20922,7 @@
                 <a:ea typeface="+mn-ea"/>
                 <a:cs typeface="+mn-cs"/>
               </a:rPr>
-              <a:t>ар бири 192.50с.</a:t>
+              <a:t>ар бири 192,50с.</a:t>
             </a:r>
           </a:p>
           <a:p>
@@ -21215,7 +21215,7 @@
                 <a:ea typeface="+mn-ea"/>
                 <a:cs typeface="+mn-cs"/>
               </a:rPr>
-              <a:t> таңгак 714.99 сом ЖЕ</a:t>
+              <a:t> таңгак 714,99 сом ЖЕ</a:t>
             </a:r>
           </a:p>
           <a:p>
@@ -21287,7 +21287,7 @@
                 <a:ea typeface="+mn-ea"/>
                 <a:cs typeface="+mn-cs"/>
               </a:rPr>
-              <a:t>таңгак 473.00 сом</a:t>
+              <a:t>таңгак 473,00 сом</a:t>
             </a:r>
           </a:p>
           <a:p>
@@ -21546,7 +21546,7 @@
                 <a:ea typeface="+mn-ea"/>
                 <a:cs typeface="+mn-cs"/>
               </a:rPr>
-              <a:t>бири 247.50 сом.</a:t>
+              <a:t>бири 247,50 сом.</a:t>
             </a:r>
           </a:p>
           <a:p>
@@ -21618,7 +21618,7 @@
                 <a:ea typeface="+mn-ea"/>
                 <a:cs typeface="+mn-cs"/>
               </a:rPr>
-              <a:t> 95.70 сом.</a:t>
+              <a:t> 95,70 сом.</a:t>
             </a:r>
           </a:p>
           <a:p>
@@ -21805,7 +21805,7 @@
                 <a:ea typeface="+mn-ea"/>
                 <a:cs typeface="+mn-cs"/>
               </a:rPr>
-              <a:t>Чоңдорго билет: 478.50с</a:t>
+              <a:t>Чоңдорго билет: 478,50с</a:t>
             </a:r>
           </a:p>
           <a:p>
@@ -21841,7 +21841,7 @@
                 <a:ea typeface="+mn-ea"/>
                 <a:cs typeface="+mn-cs"/>
               </a:rPr>
-              <a:t>Балдар билети: 275.00с</a:t>
+              <a:t>Балдар билети: 275,00с</a:t>
             </a:r>
           </a:p>
           <a:p>
@@ -21877,7 +21877,7 @@
                 <a:ea typeface="+mn-ea"/>
                 <a:cs typeface="+mn-cs"/>
               </a:rPr>
-              <a:t>Топтук билет: 1979.99с </a:t>
+              <a:t>Топтук билет: 1979,99с </a:t>
             </a:r>
           </a:p>
           <a:p>
@@ -22100,7 +22100,7 @@
                 <a:ea typeface="+mn-ea"/>
                 <a:cs typeface="+mn-cs"/>
               </a:rPr>
-              <a:t>2 картошка: 20.70 с</a:t>
+              <a:t>2 картошка: 20,70 с</a:t>
             </a:r>
             <a:r>
               <a:rPr kumimoji="0" lang="en-GB" sz="1600" b="0" i="0" u="none" strike="noStrike" kern="1200" cap="none" spc="0" normalizeH="0" baseline="0" noProof="0" dirty="0">
@@ -22170,7 +22170,7 @@
                 <a:ea typeface="+mn-ea"/>
                 <a:cs typeface="+mn-cs"/>
               </a:rPr>
-              <a:t>4 филе: ар бири 294.80с</a:t>
+              <a:t>4 филе: ар бири 294,80с</a:t>
             </a:r>
           </a:p>
           <a:p>
@@ -22440,7 +22440,7 @@
                 <a:ea typeface="+mn-ea"/>
                 <a:cs typeface="+mn-cs"/>
               </a:rPr>
-              <a:t>Чоңдорго билет: 500.50 с</a:t>
+              <a:t>Чоңдорго билет: 500,50 с</a:t>
             </a:r>
           </a:p>
           <a:p>
@@ -22476,7 +22476,7 @@
                 <a:ea typeface="+mn-ea"/>
                 <a:cs typeface="+mn-cs"/>
               </a:rPr>
-              <a:t>Балдар билети: 302.50 с</a:t>
+              <a:t>Балдар билети: 302,50 с</a:t>
             </a:r>
           </a:p>
           <a:p>
